--- a/07/ppt/07-2_개인정보와_암호화_v1.pptx
+++ b/07/ppt/07-2_개인정보와_암호화_v1.pptx
@@ -610,9 +610,10 @@
 (왼쪽 아래 카드를 가리키며) 암호화는 서버에서만 하는 게 아닙니다. 엑셀 파일이나 압축 파일에도 암호를 걸 수 있습니다. 개인정보가 든 파일을 주고받을 때는 암호를 걸어 보냅니다.
 (오른쪽 아래 카드를 가리키며) 그럼 데이터베이스에 저장한 정보는 어떻게 지킬까요? 다음 장에서 비밀번호로 봅니다.
 [시연 · DataGrip]
-교과서_배포/07/teacher_tools/07-2_평문비밀번호_예시.sqlite 를 DataGrip으로 연다(새 데이터 소스 → SQLite → 파일 선택). members 표를 더블클릭하면 password 열에 mypw123 같은 비밀번호가 그대로 보인다.
+교과서_배포/07/teacher_tools/07-2_비밀번호_저장_예시.sqlite 를 DataGrip으로 연다(새 데이터 소스 → SQLite → 파일 선택). members_plain 표를 더블클릭하면 password 열에 mypw123 같은 비밀번호가 그대로 보인다.
 「개발자는 DB를 이렇게 쉽게 들여다본다. 비밀번호를 평문으로 두면 들여다보는 누구에게나 보인다」까지만 말한다. SQL은 치지 않고 표를 열어 보여 주기만 한다.
 이름·아이디·전화번호(010-0000 대역)는 모두 지어낸 값이다. 파일을 다시 만들려면 같은 폴더의 make_plaintext_db.py를 실행한다.
+같은 파일의 members_hashed 표(암호화된 예시)는 4쪽(단방향) 장에서 연다.
 [진행 메모]
 3분. 사고 이야기는 겁주기보다 「개인정보를 다루면 조심해야 한다」 한 줄로 맺는다.</a:t>
             </a:r>
@@ -801,9 +802,13 @@
               <a:t>[7–10분] 그래서 비밀번호는 단방향 암호화
 그래서 비밀번호는 아무도 다시 열 수 없게 바꿔서 저장합니다. 이걸 단방향 암호화라고 합니다.
 (그림을 가리키며) 믹서기를 생각해 보세요. 과일을 갈면 주스가 되죠. 주스를 다시 과일로 되돌릴 수는 없습니다. 그런데 같은 과일을 넣으면 몇 번을 갈아도 똑같은 주스가 나옵니다.
-(오른쪽 코드를 가리키며) 비밀번호도 같습니다. mypw123을 몇 번을 바꿔도 결과는 늘 ef92b7…입니다. 거꾸로 되돌릴 수는 없고요.
+(오른쪽 코드를 가리키며) 비밀번호도 같습니다. mypw123을 몇 번을 바꿔도 결과는 늘 989e0d…입니다. 거꾸로 되돌릴 수는 없고요.
 (아래 코드를 가리키며) 그럼 로그인은 어떻게 할까요? 가입할 때 바꾼 결과만 저장해 둡니다. 로그인할 때 입력한 비밀번호를 같은 방법으로 바꿔서, 저장된 값과 같은지만 봅니다. 같으면 로그인, 한 글자라도 다르면 결과가 완전히 달라져서 거절.
 (아래 줄을 가리키며) 그래서 회사 직원도 내 비밀번호를 모릅니다. 비밀번호를 잊으면 「찾기」가 아니라 「재설정」을 하는 이유입니다.
+[시연 · DataGrip]
+같은 파일의 members_hashed 표를 열어 members_plain 표와 나란히 보여 준다. password_hash 열에는 알아볼 수 없는 값만 있다.
+minjun07의 값이 화면의 989e0d…와 같다(mypw123의 SHA-256). jiho.park와 doyun_k는 둘 다 qwerty1234라서 결과도 똑같다 → 「같은 것을 넣으면 같은 결과」.
+수업용으로 salt 없이 SHA-256만 썼다. 「실제 서비스는 사람마다 다른 값(salt)을 붙여 같은 비밀번호라도 결과가 달라지게 한다」는 묻는 학생에게만.
 [진행 메모]
 3분. 「같은 것을 넣으면 같은 결과」가 이 장의 핵심이다. 해시라는 말은 꺼내지 않아도 된다.
 [교사 참고 · 단방향에도 key가 필요한가?]
@@ -3619,7 +3624,7 @@
                 <a:ea typeface="IBM Plex Mono" pitchFamily="34" charset="-122"/>
                 <a:cs typeface="IBM Plex Mono" pitchFamily="34" charset="-120"/>
               </a:rPr>
-              <a:t>mypw123 → 1번째 → ef92b7…</a:t>
+              <a:t>mypw123 → 1번째 → 989e0d…</a:t>
             </a:r>
             <a:endParaRPr lang="en-US" sz="1450" dirty="0"/>
           </a:p>
@@ -3639,7 +3644,7 @@
                 <a:ea typeface="IBM Plex Mono" pitchFamily="34" charset="-122"/>
                 <a:cs typeface="IBM Plex Mono" pitchFamily="34" charset="-120"/>
               </a:rPr>
-              <a:t>mypw123 → 2번째 → ef92b7…</a:t>
+              <a:t>mypw123 → 2번째 → 989e0d…</a:t>
             </a:r>
             <a:endParaRPr lang="en-US" sz="1450" dirty="0"/>
           </a:p>
@@ -3659,7 +3664,7 @@
                 <a:ea typeface="IBM Plex Mono" pitchFamily="34" charset="-122"/>
                 <a:cs typeface="IBM Plex Mono" pitchFamily="34" charset="-120"/>
               </a:rPr>
-              <a:t>mypw123 → 3번째 → ef92b7…</a:t>
+              <a:t>mypw123 → 3번째 → 989e0d…</a:t>
             </a:r>
             <a:endParaRPr lang="en-US" sz="1450" dirty="0"/>
           </a:p>
@@ -3679,7 +3684,7 @@
                 <a:ea typeface="IBM Plex Mono" pitchFamily="34" charset="-122"/>
                 <a:cs typeface="IBM Plex Mono" pitchFamily="34" charset="-120"/>
               </a:rPr>
-              <a:t>ef92b7… → mypw123   ✕ 되돌릴 수 없다</a:t>
+              <a:t>989e0d… → mypw123   ✕ 되돌릴 수 없다</a:t>
             </a:r>
             <a:endParaRPr lang="en-US" sz="1450" dirty="0"/>
           </a:p>
@@ -3740,7 +3745,7 @@
                 <a:ea typeface="IBM Plex Mono" pitchFamily="34" charset="-122"/>
                 <a:cs typeface="IBM Plex Mono" pitchFamily="34" charset="-120"/>
               </a:rPr>
-              <a:t>로그인은 바꾼 결과끼리 비교한다 · 저장된 값 ef92b7…</a:t>
+              <a:t>로그인은 바꾼 결과끼리 비교한다 · 저장된 값 989e0d…</a:t>
             </a:r>
             <a:endParaRPr lang="en-US" sz="950" dirty="0"/>
           </a:p>
@@ -3782,7 +3787,7 @@
                 <a:ea typeface="IBM Plex Mono" pitchFamily="34" charset="-122"/>
                 <a:cs typeface="IBM Plex Mono" pitchFamily="34" charset="-120"/>
               </a:rPr>
-              <a:t>입력 mypw123 → 바꾸기 → ef92b7…   = 저장된 값   ○ 로그인</a:t>
+              <a:t>입력 mypw123 → 바꾸기 → 989e0d…   = 저장된 값   ○ 로그인</a:t>
             </a:r>
             <a:endParaRPr lang="en-US" sz="1450" dirty="0"/>
           </a:p>
@@ -3802,7 +3807,7 @@
                 <a:ea typeface="IBM Plex Mono" pitchFamily="34" charset="-122"/>
                 <a:cs typeface="IBM Plex Mono" pitchFamily="34" charset="-120"/>
               </a:rPr>
-              <a:t>입력 mypw124 → 바꾸기 → 3b1c0a…   ≠ 저장된 값   ✕ 거절</a:t>
+              <a:t>입력 mypw124 → 바꾸기 → c98252…   ≠ 저장된 값   ✕ 거절</a:t>
             </a:r>
             <a:endParaRPr lang="en-US" sz="1450" dirty="0"/>
           </a:p>
